--- a/docs/customer-documents/orgcomp-series/Vol_IX_Book_05_OrgComp_SaaS_Integration_Governance.pptx
+++ b/docs/customer-documents/orgcomp-series/Vol_IX_Book_05_OrgComp_SaaS_Integration_Governance.pptx
@@ -522,7 +522,7 @@
           <a:p/>
           <a:p>
             <a:r>
-              <a:t>Vendor sources: host repo: docs/customer-documents/federal-aan-series/servicenow-day2/saas-control-map.json</a:t>
+              <a:t>Vendor sources: host repo: docs/customer-documents/orgcomp-series/servicenow-day2/saas-control-map.json</a:t>
             </a:r>
           </a:p>
         </p:txBody>
@@ -744,7 +744,7 @@
           <a:p/>
           <a:p>
             <a:r>
-              <a:t>Vendor sources: host repo: docs/customer-documents/federal-aan-series/servicenow-day2/saas-control-map.json | https://learn.microsoft.com/graph/ | https://learn.microsoft.com/en-us/graph/api/resources/applicationtemplate</a:t>
+              <a:t>Vendor sources: host repo: docs/customer-documents/orgcomp-series/servicenow-day2/saas-control-map.json | https://learn.microsoft.com/graph/ | https://learn.microsoft.com/en-us/graph/api/resources/applicationtemplate</a:t>
             </a:r>
           </a:p>
         </p:txBody>
@@ -820,7 +820,7 @@
           <a:p/>
           <a:p>
             <a:r>
-              <a:t>Vendor sources: host repo: docs/customer-documents/federal-aan-series/servicenow-day2/saas-control-map.json</a:t>
+              <a:t>Vendor sources: host repo: docs/customer-documents/orgcomp-series/servicenow-day2/saas-control-map.json</a:t>
             </a:r>
           </a:p>
         </p:txBody>
@@ -1048,7 +1048,7 @@
           <a:p/>
           <a:p>
             <a:r>
-              <a:t>Vendor sources: host repo: docs/customer-documents/federal-aan-series/servicenow-day2/saas-control-map.json</a:t>
+              <a:t>Vendor sources: host repo: docs/customer-documents/orgcomp-series/servicenow-day2/saas-control-map.json</a:t>
             </a:r>
           </a:p>
         </p:txBody>
@@ -5327,7 +5327,7 @@
                 </a:solidFill>
                 <a:latin typeface="Arial"/>
               </a:rPr>
-              <a:t>Date Code: 2026-07-16 09:48 ET</a:t>
+              <a:t>Date Code: 2026-07-21 14:46 ET</a:t>
             </a:r>
           </a:p>
         </p:txBody>
@@ -5515,7 +5515,7 @@
                 </a:solidFill>
                 <a:latin typeface="Arial"/>
               </a:rPr>
-              <a:t>SaaS Integration Governance · Date Code: 2026-07-16 09:48 ET</a:t>
+              <a:t>SaaS Integration Governance · Date Code: 2026-07-21 14:46 ET</a:t>
             </a:r>
           </a:p>
         </p:txBody>
@@ -6961,7 +6961,7 @@
                 </a:solidFill>
                 <a:latin typeface="Arial"/>
               </a:rPr>
-              <a:t>SaaS Integration Governance · Date Code: 2026-07-16 09:48 ET</a:t>
+              <a:t>SaaS Integration Governance · Date Code: 2026-07-21 14:46 ET</a:t>
             </a:r>
           </a:p>
         </p:txBody>
@@ -8407,7 +8407,7 @@
                 </a:solidFill>
                 <a:latin typeface="Arial"/>
               </a:rPr>
-              <a:t>SaaS Integration Governance · Date Code: 2026-07-16 09:48 ET</a:t>
+              <a:t>SaaS Integration Governance · Date Code: 2026-07-21 14:46 ET</a:t>
             </a:r>
           </a:p>
         </p:txBody>
@@ -9314,7 +9314,7 @@
                 </a:solidFill>
                 <a:latin typeface="Arial"/>
               </a:rPr>
-              <a:t>SaaS Integration Governance · Date Code: 2026-07-16 09:48 ET</a:t>
+              <a:t>SaaS Integration Governance · Date Code: 2026-07-21 14:46 ET</a:t>
             </a:r>
           </a:p>
         </p:txBody>
@@ -10221,7 +10221,7 @@
                 </a:solidFill>
                 <a:latin typeface="Arial"/>
               </a:rPr>
-              <a:t>SaaS Integration Governance · Date Code: 2026-07-16 09:48 ET</a:t>
+              <a:t>SaaS Integration Governance · Date Code: 2026-07-21 14:46 ET</a:t>
             </a:r>
           </a:p>
         </p:txBody>
@@ -11128,7 +11128,7 @@
                 </a:solidFill>
                 <a:latin typeface="Arial"/>
               </a:rPr>
-              <a:t>SaaS Integration Governance · Date Code: 2026-07-16 09:48 ET</a:t>
+              <a:t>SaaS Integration Governance · Date Code: 2026-07-21 14:46 ET</a:t>
             </a:r>
           </a:p>
         </p:txBody>
@@ -12035,7 +12035,7 @@
                 </a:solidFill>
                 <a:latin typeface="Arial"/>
               </a:rPr>
-              <a:t>SaaS Integration Governance · Date Code: 2026-07-16 09:48 ET</a:t>
+              <a:t>SaaS Integration Governance · Date Code: 2026-07-21 14:46 ET</a:t>
             </a:r>
           </a:p>
         </p:txBody>
@@ -12258,7 +12258,7 @@
                 </a:solidFill>
                 <a:latin typeface="Arial"/>
               </a:rPr>
-              <a:t>SaaS Integration Governance · Date Code: 2026-07-16 09:48 ET</a:t>
+              <a:t>SaaS Integration Governance · Date Code: 2026-07-21 14:46 ET</a:t>
             </a:r>
           </a:p>
         </p:txBody>
@@ -13165,7 +13165,7 @@
                 </a:solidFill>
                 <a:latin typeface="Arial"/>
               </a:rPr>
-              <a:t>SaaS Integration Governance · Date Code: 2026-07-16 09:48 ET</a:t>
+              <a:t>SaaS Integration Governance · Date Code: 2026-07-21 14:46 ET</a:t>
             </a:r>
           </a:p>
         </p:txBody>
@@ -14072,7 +14072,7 @@
                 </a:solidFill>
                 <a:latin typeface="Arial"/>
               </a:rPr>
-              <a:t>SaaS Integration Governance · Date Code: 2026-07-16 09:48 ET</a:t>
+              <a:t>SaaS Integration Governance · Date Code: 2026-07-21 14:46 ET</a:t>
             </a:r>
           </a:p>
         </p:txBody>
@@ -15518,7 +15518,7 @@
                 </a:solidFill>
                 <a:latin typeface="Arial"/>
               </a:rPr>
-              <a:t>SaaS Integration Governance · Date Code: 2026-07-16 09:48 ET</a:t>
+              <a:t>SaaS Integration Governance · Date Code: 2026-07-21 14:46 ET</a:t>
             </a:r>
           </a:p>
         </p:txBody>
@@ -16964,7 +16964,7 @@
                 </a:solidFill>
                 <a:latin typeface="Arial"/>
               </a:rPr>
-              <a:t>SaaS Integration Governance · Date Code: 2026-07-16 09:48 ET</a:t>
+              <a:t>SaaS Integration Governance · Date Code: 2026-07-21 14:46 ET</a:t>
             </a:r>
           </a:p>
         </p:txBody>
@@ -18410,7 +18410,7 @@
                 </a:solidFill>
                 <a:latin typeface="Arial"/>
               </a:rPr>
-              <a:t>SaaS Integration Governance · Date Code: 2026-07-16 09:48 ET</a:t>
+              <a:t>SaaS Integration Governance · Date Code: 2026-07-21 14:46 ET</a:t>
             </a:r>
           </a:p>
         </p:txBody>
@@ -19856,7 +19856,7 @@
                 </a:solidFill>
                 <a:latin typeface="Arial"/>
               </a:rPr>
-              <a:t>SaaS Integration Governance · Date Code: 2026-07-16 09:48 ET</a:t>
+              <a:t>SaaS Integration Governance · Date Code: 2026-07-21 14:46 ET</a:t>
             </a:r>
           </a:p>
         </p:txBody>
